--- a/classes/parte-2-deep-learning/116-regularizacion-l1-l2-dropout-max-norm-mc-dropout/clase-116-regularizacion-l1-l2-dropout-max-norm-mc-dropout-presentacion.pptx
+++ b/classes/parte-2-deep-learning/116-regularizacion-l1-l2-dropout-max-norm-mc-dropout/clase-116-regularizacion-l1-l2-dropout-max-norm-mc-dropout-presentacion.pptx
@@ -4823,7 +4823,7 @@
                 </a:solidFill>
                 <a:latin typeface="Segoe UI"/>
               </a:rPr>
-              <a:t>Primer bloque ejecutable del notebook.</a:t>
+              <a:t>l2 (weight decay) mantiene pesos chicos; l1 promueve sparsity. Se pasan como kernel_regularizer.</a:t>
             </a:r>
           </a:p>
         </p:txBody>
@@ -4910,7 +4910,273 @@
                 </a:solidFill>
                 <a:latin typeface="Courier New"/>
               </a:rPr>
-              <a:t># Imports y configuración inicial</a:t>
+              <a:t>import numpy as np</a:t>
+            </a:r>
+          </a:p>
+          <a:p>
+            <a:pPr>
+              <a:defRPr sz="1200" b="0">
+                <a:solidFill>
+                  <a:srgbClr val="F8FAFC"/>
+                </a:solidFill>
+                <a:latin typeface="Courier New"/>
+              </a:defRPr>
+            </a:pPr>
+            <a:r>
+              <a:rPr sz="1200" b="0">
+                <a:solidFill>
+                  <a:srgbClr val="F8FAFC"/>
+                </a:solidFill>
+                <a:latin typeface="Courier New"/>
+              </a:rPr>
+              <a:t>import tensorflow as tf</a:t>
+            </a:r>
+          </a:p>
+          <a:p>
+            <a:pPr>
+              <a:defRPr sz="1200" b="0">
+                <a:solidFill>
+                  <a:srgbClr val="F8FAFC"/>
+                </a:solidFill>
+                <a:latin typeface="Courier New"/>
+              </a:defRPr>
+            </a:pPr>
+            <a:r>
+              <a:rPr sz="1200" b="0">
+                <a:solidFill>
+                  <a:srgbClr val="F8FAFC"/>
+                </a:solidFill>
+                <a:latin typeface="Courier New"/>
+              </a:rPr>
+              <a:t>from tensorflow import keras</a:t>
+            </a:r>
+          </a:p>
+          <a:p>
+            <a:pPr>
+              <a:defRPr sz="1200" b="0">
+                <a:solidFill>
+                  <a:srgbClr val="F8FAFC"/>
+                </a:solidFill>
+                <a:latin typeface="Courier New"/>
+              </a:defRPr>
+            </a:pPr>
+            <a:r>
+              <a:rPr sz="1200" b="0">
+                <a:solidFill>
+                  <a:srgbClr val="F8FAFC"/>
+                </a:solidFill>
+                <a:latin typeface="Courier New"/>
+              </a:rPr>
+              <a:t>from tensorflow.keras import layers</a:t>
+            </a:r>
+          </a:p>
+          <a:p>
+            <a:pPr>
+              <a:defRPr sz="1200" b="0">
+                <a:solidFill>
+                  <a:srgbClr val="F8FAFC"/>
+                </a:solidFill>
+                <a:latin typeface="Courier New"/>
+              </a:defRPr>
+            </a:pPr>
+            <a:r>
+              <a:rPr sz="1200" b="0">
+                <a:solidFill>
+                  <a:srgbClr val="F8FAFC"/>
+                </a:solidFill>
+                <a:latin typeface="Courier New"/>
+              </a:rPr>
+              <a:t>keras.utils.set_random_seed(42)</a:t>
+            </a:r>
+          </a:p>
+          <a:p>
+            <a:pPr>
+              <a:defRPr sz="1200" b="0">
+                <a:solidFill>
+                  <a:srgbClr val="F8FAFC"/>
+                </a:solidFill>
+                <a:latin typeface="Courier New"/>
+              </a:defRPr>
+            </a:pPr>
+            <a:r>
+              <a:rPr sz="1200" b="0">
+                <a:solidFill>
+                  <a:srgbClr val="F8FAFC"/>
+                </a:solidFill>
+                <a:latin typeface="Courier New"/>
+              </a:rPr>
+              <a:t> </a:t>
+            </a:r>
+          </a:p>
+          <a:p>
+            <a:pPr>
+              <a:defRPr sz="1200" b="0">
+                <a:solidFill>
+                  <a:srgbClr val="F8FAFC"/>
+                </a:solidFill>
+                <a:latin typeface="Courier New"/>
+              </a:defRPr>
+            </a:pPr>
+            <a:r>
+              <a:rPr sz="1200" b="0">
+                <a:solidFill>
+                  <a:srgbClr val="F8FAFC"/>
+                </a:solidFill>
+                <a:latin typeface="Courier New"/>
+              </a:rPr>
+              <a:t>reg_l2 = keras.Sequential([</a:t>
+            </a:r>
+          </a:p>
+          <a:p>
+            <a:pPr>
+              <a:defRPr sz="1200" b="0">
+                <a:solidFill>
+                  <a:srgbClr val="F8FAFC"/>
+                </a:solidFill>
+                <a:latin typeface="Courier New"/>
+              </a:defRPr>
+            </a:pPr>
+            <a:r>
+              <a:rPr sz="1200" b="0">
+                <a:solidFill>
+                  <a:srgbClr val="F8FAFC"/>
+                </a:solidFill>
+                <a:latin typeface="Courier New"/>
+              </a:rPr>
+              <a:t>    keras.Input(shape=(784,)),</a:t>
+            </a:r>
+          </a:p>
+          <a:p>
+            <a:pPr>
+              <a:defRPr sz="1200" b="0">
+                <a:solidFill>
+                  <a:srgbClr val="F8FAFC"/>
+                </a:solidFill>
+                <a:latin typeface="Courier New"/>
+              </a:defRPr>
+            </a:pPr>
+            <a:r>
+              <a:rPr sz="1200" b="0">
+                <a:solidFill>
+                  <a:srgbClr val="F8FAFC"/>
+                </a:solidFill>
+                <a:latin typeface="Courier New"/>
+              </a:rPr>
+              <a:t>    layers.Dense(512, activation="relu", kernel_regularizer=keras.regularizers.l2(1e-3)),</a:t>
+            </a:r>
+          </a:p>
+          <a:p>
+            <a:pPr>
+              <a:defRPr sz="1200" b="0">
+                <a:solidFill>
+                  <a:srgbClr val="F8FAFC"/>
+                </a:solidFill>
+                <a:latin typeface="Courier New"/>
+              </a:defRPr>
+            </a:pPr>
+            <a:r>
+              <a:rPr sz="1200" b="0">
+                <a:solidFill>
+                  <a:srgbClr val="F8FAFC"/>
+                </a:solidFill>
+                <a:latin typeface="Courier New"/>
+              </a:rPr>
+              <a:t>    layers.Dense(256, activation="relu", kernel_regularizer=keras.regularizers.l2(1e-3)),</a:t>
+            </a:r>
+          </a:p>
+          <a:p>
+            <a:pPr>
+              <a:defRPr sz="1200" b="0">
+                <a:solidFill>
+                  <a:srgbClr val="F8FAFC"/>
+                </a:solidFill>
+                <a:latin typeface="Courier New"/>
+              </a:defRPr>
+            </a:pPr>
+            <a:r>
+              <a:rPr sz="1200" b="0">
+                <a:solidFill>
+                  <a:srgbClr val="F8FAFC"/>
+                </a:solidFill>
+                <a:latin typeface="Courier New"/>
+              </a:rPr>
+              <a:t>    layers.Dense(10,  activation="softmax"),</a:t>
+            </a:r>
+          </a:p>
+          <a:p>
+            <a:pPr>
+              <a:defRPr sz="1200" b="0">
+                <a:solidFill>
+                  <a:srgbClr val="F8FAFC"/>
+                </a:solidFill>
+                <a:latin typeface="Courier New"/>
+              </a:defRPr>
+            </a:pPr>
+            <a:r>
+              <a:rPr sz="1200" b="0">
+                <a:solidFill>
+                  <a:srgbClr val="F8FAFC"/>
+                </a:solidFill>
+                <a:latin typeface="Courier New"/>
+              </a:rPr>
+              <a:t>])</a:t>
+            </a:r>
+          </a:p>
+          <a:p>
+            <a:pPr>
+              <a:defRPr sz="1200" b="0">
+                <a:solidFill>
+                  <a:srgbClr val="F8FAFC"/>
+                </a:solidFill>
+                <a:latin typeface="Courier New"/>
+              </a:defRPr>
+            </a:pPr>
+            <a:r>
+              <a:rPr sz="1200" b="0">
+                <a:solidFill>
+                  <a:srgbClr val="F8FAFC"/>
+                </a:solidFill>
+                <a:latin typeface="Courier New"/>
+              </a:rPr>
+              <a:t>reg_l2.compile(optimizer="adam", loss="sparse_categorical_crossentropy", metrics=["accuracy"])</a:t>
+            </a:r>
+          </a:p>
+          <a:p>
+            <a:pPr>
+              <a:defRPr sz="1200" b="0">
+                <a:solidFill>
+                  <a:srgbClr val="F8FAFC"/>
+                </a:solidFill>
+                <a:latin typeface="Courier New"/>
+              </a:defRPr>
+            </a:pPr>
+            <a:r>
+              <a:rPr sz="1200" b="0">
+                <a:solidFill>
+                  <a:srgbClr val="F8FAFC"/>
+                </a:solidFill>
+                <a:latin typeface="Courier New"/>
+              </a:rPr>
+              <a:t>print("l1:", keras.regularizers.l1(1e-4),</a:t>
+            </a:r>
+          </a:p>
+          <a:p>
+            <a:pPr>
+              <a:defRPr sz="1200" b="0">
+                <a:solidFill>
+                  <a:srgbClr val="F8FAFC"/>
+                </a:solidFill>
+                <a:latin typeface="Courier New"/>
+              </a:defRPr>
+            </a:pPr>
+            <a:r>
+              <a:rPr sz="1200" b="0">
+                <a:solidFill>
+                  <a:srgbClr val="F8FAFC"/>
+                </a:solidFill>
+                <a:latin typeface="Courier New"/>
+              </a:rPr>
+              <a:t>      "| l1_l2:", keras.regularizers.l1_l2(l1=1e-5, l2=1e-4))</a:t>
             </a:r>
           </a:p>
         </p:txBody>

--- a/classes/parte-2-deep-learning/116-regularizacion-l1-l2-dropout-max-norm-mc-dropout/clase-116-regularizacion-l1-l2-dropout-max-norm-mc-dropout-presentacion.pptx
+++ b/classes/parte-2-deep-learning/116-regularizacion-l1-l2-dropout-max-norm-mc-dropout/clase-116-regularizacion-l1-l2-dropout-max-norm-mc-dropout-presentacion.pptx
@@ -3272,7 +3272,7 @@
                 </a:solidFill>
                 <a:latin typeface="Segoe UI"/>
               </a:rPr>
-              <a:t>Parte: 2 — Deep Learning · Fuente: Géron, cap. 11 § Regularization + Huang et al. (2016) Deep Networks with Stochastic Depth.  Duración estimada: 80 min.</a:t>
+              <a:t>Parte: 2 — Deep Learning · Fuente: Géron, cap. 11 § Regularization + Huang et al. (2016) Deep Networks with Stochastic Depth.  Duración estimada: 80 min. · Nivel: Avanzado</a:t>
             </a:r>
           </a:p>
         </p:txBody>
@@ -3581,7 +3581,7 @@
                 </a:solidFill>
                 <a:latin typeface="Segoe UI"/>
               </a:rPr>
-              <a:t>Parte: 2 — Deep Learning · Fuente: Géron, cap. 11 § Regularization + Huang et al. (2016) Deep Networks with Stochastic Depth.  Duración estimada: 80 min.</a:t>
+              <a:t>Parte: 2 — Deep Learning · Fuente: Géron, cap. 11 § Regularization + Huang et al. (2016) Deep Networks with Stochastic Depth.  Duración estimada: 80 min. · Nivel: Avanzado</a:t>
             </a:r>
           </a:p>
         </p:txBody>
